--- a/in_class_slides/geog4300_L01-Introductions.pptx
+++ b/in_class_slides/geog4300_L01-Introductions.pptx
@@ -7373,7 +7373,7 @@
       </p:grpSpPr>
       <p:pic>
         <p:nvPicPr>
-          <p:cNvPr id="7" name="Picture 6">
+          <p:cNvPr id="7" name="Picture 6" descr="Learning standards from the course website">
             <a:extLst>
               <a:ext uri="{FF2B5EF4-FFF2-40B4-BE49-F238E27FC236}">
                 <a16:creationId xmlns:a16="http://schemas.microsoft.com/office/drawing/2014/main" id="{E0DB93A1-0767-7664-A398-6377EA2B91BE}"/>
@@ -7403,7 +7403,7 @@
       </p:pic>
       <p:sp>
         <p:nvSpPr>
-          <p:cNvPr id="9" name="TextBox 8">
+          <p:cNvPr id="9" name="TextBox 8" descr="Learning standards from the course website: https://communitymaplab.github.io/geog4300_datascience/learning_standards.html&#10;">
             <a:extLst>
               <a:ext uri="{FF2B5EF4-FFF2-40B4-BE49-F238E27FC236}">
                 <a16:creationId xmlns:a16="http://schemas.microsoft.com/office/drawing/2014/main" id="{6100A121-DE1B-15F9-491F-11D1062EDFC3}"/>
@@ -7437,6 +7437,58 @@
               </a:rPr>
               <a:t>https://communitymaplab.github.io/geog4300_datascience/learning_standards.html</a:t>
             </a:r>
+          </a:p>
+        </p:txBody>
+      </p:sp>
+      <p:sp>
+        <p:nvSpPr>
+          <p:cNvPr id="2" name="Title 1">
+            <a:extLst>
+              <a:ext uri="{FF2B5EF4-FFF2-40B4-BE49-F238E27FC236}">
+                <a16:creationId xmlns:a16="http://schemas.microsoft.com/office/drawing/2014/main" id="{C1D5AAB6-6249-41B2-B4EB-D101AEEC7030}"/>
+              </a:ext>
+            </a:extLst>
+          </p:cNvPr>
+          <p:cNvSpPr>
+            <a:spLocks noGrp="1"/>
+          </p:cNvSpPr>
+          <p:nvPr>
+            <p:ph type="title" idx="4294967295"/>
+          </p:nvPr>
+        </p:nvSpPr>
+        <p:spPr>
+          <a:xfrm>
+            <a:off x="70596" y="2824701"/>
+            <a:ext cx="1814885" cy="604299"/>
+          </a:xfrm>
+        </p:spPr>
+        <p:txBody>
+          <a:bodyPr>
+            <a:normAutofit/>
+          </a:bodyPr>
+          <a:lstStyle/>
+          <a:p>
+            <a:r>
+              <a:rPr lang="en-US" sz="800" dirty="0">
+                <a:solidFill>
+                  <a:schemeClr val="bg1"/>
+                </a:solidFill>
+              </a:rPr>
+              <a:t>Course</a:t>
+            </a:r>
+            <a:r>
+              <a:rPr lang="en-US" sz="800" baseline="0" dirty="0">
+                <a:solidFill>
+                  <a:schemeClr val="bg1"/>
+                </a:solidFill>
+              </a:rPr>
+              <a:t> learning standards</a:t>
+            </a:r>
+            <a:endParaRPr lang="en-US" sz="800" dirty="0">
+              <a:solidFill>
+                <a:schemeClr val="bg1"/>
+              </a:solidFill>
+            </a:endParaRPr>
           </a:p>
         </p:txBody>
       </p:sp>
@@ -7478,112 +7530,6 @@
           <a:chExt cx="0" cy="0"/>
         </a:xfrm>
       </p:grpSpPr>
-      <p:sp>
-        <p:nvSpPr>
-          <p:cNvPr id="7" name="Rectangle 1">
-            <a:extLst>
-              <a:ext uri="{FF2B5EF4-FFF2-40B4-BE49-F238E27FC236}">
-                <a16:creationId xmlns:a16="http://schemas.microsoft.com/office/drawing/2014/main" id="{BA6931D2-95A3-E932-BA8F-555E6DCA8798}"/>
-              </a:ext>
-            </a:extLst>
-          </p:cNvPr>
-          <p:cNvSpPr>
-            <a:spLocks noChangeArrowheads="1"/>
-          </p:cNvSpPr>
-          <p:nvPr/>
-        </p:nvSpPr>
-        <p:spPr bwMode="auto">
-          <a:xfrm>
-            <a:off x="3119438" y="2036763"/>
-            <a:ext cx="12192000" cy="457200"/>
-          </a:xfrm>
-          <a:prstGeom prst="rect">
-            <a:avLst/>
-          </a:prstGeom>
-          <a:noFill/>
-          <a:ln>
-            <a:noFill/>
-          </a:ln>
-          <a:effectLst/>
-          <a:extLst>
-            <a:ext uri="{909E8E84-426E-40DD-AFC4-6F175D3DCCD1}">
-              <a14:hiddenFill xmlns:a14="http://schemas.microsoft.com/office/drawing/2010/main">
-                <a:solidFill>
-                  <a:schemeClr val="accent1"/>
-                </a:solidFill>
-              </a14:hiddenFill>
-            </a:ext>
-            <a:ext uri="{91240B29-F687-4F45-9708-019B960494DF}">
-              <a14:hiddenLine xmlns:a14="http://schemas.microsoft.com/office/drawing/2010/main" w="9525">
-                <a:solidFill>
-                  <a:schemeClr val="tx1"/>
-                </a:solidFill>
-                <a:miter lim="800000"/>
-                <a:headEnd/>
-                <a:tailEnd/>
-              </a14:hiddenLine>
-            </a:ext>
-            <a:ext uri="{AF507438-7753-43E0-B8FC-AC1667EBCBE1}">
-              <a14:hiddenEffects xmlns:a14="http://schemas.microsoft.com/office/drawing/2010/main">
-                <a:effectLst>
-                  <a:outerShdw dist="35921" dir="2700000" algn="ctr" rotWithShape="0">
-                    <a:schemeClr val="bg2"/>
-                  </a:outerShdw>
-                </a:effectLst>
-              </a14:hiddenEffects>
-            </a:ext>
-          </a:extLst>
-        </p:spPr>
-        <p:txBody>
-          <a:bodyPr vert="horz" wrap="none" lIns="91440" tIns="45720" rIns="91440" bIns="45720" numCol="1" anchor="ctr" anchorCtr="0" compatLnSpc="1">
-            <a:prstTxWarp prst="textNoShape">
-              <a:avLst/>
-            </a:prstTxWarp>
-            <a:spAutoFit/>
-          </a:bodyPr>
-          <a:lstStyle/>
-          <a:p>
-            <a:pPr marL="0" marR="0" lvl="0" indent="0" algn="l" defTabSz="914400" rtl="0" eaLnBrk="0" fontAlgn="base" latinLnBrk="0" hangingPunct="0">
-              <a:lnSpc>
-                <a:spcPct val="100000"/>
-              </a:lnSpc>
-              <a:spcBef>
-                <a:spcPct val="0"/>
-              </a:spcBef>
-              <a:spcAft>
-                <a:spcPct val="0"/>
-              </a:spcAft>
-              <a:buClrTx/>
-              <a:buSzTx/>
-              <a:buFontTx/>
-              <a:buNone/>
-              <a:tabLst/>
-            </a:pPr>
-            <a:br>
-              <a:rPr kumimoji="0" lang="en-US" altLang="en-US" sz="1800" b="0" i="0" u="none" strike="noStrike" cap="none" normalizeH="0" baseline="0">
-                <a:ln>
-                  <a:noFill/>
-                </a:ln>
-                <a:solidFill>
-                  <a:schemeClr val="tx1"/>
-                </a:solidFill>
-                <a:effectLst/>
-                <a:latin typeface="Arial" panose="020B0604020202020204" pitchFamily="34" charset="0"/>
-              </a:rPr>
-            </a:br>
-            <a:endParaRPr kumimoji="0" lang="en-US" altLang="en-US" sz="1800" b="0" i="0" u="none" strike="noStrike" cap="none" normalizeH="0" baseline="0">
-              <a:ln>
-                <a:noFill/>
-              </a:ln>
-              <a:solidFill>
-                <a:schemeClr val="tx1"/>
-              </a:solidFill>
-              <a:effectLst/>
-              <a:latin typeface="Arial" panose="020B0604020202020204" pitchFamily="34" charset="0"/>
-            </a:endParaRPr>
-          </a:p>
-        </p:txBody>
-      </p:sp>
       <p:graphicFrame>
         <p:nvGraphicFramePr>
           <p:cNvPr id="5" name="Table 4">
@@ -7599,19 +7545,19 @@
           <p:nvPr>
             <p:extLst>
               <p:ext uri="{D42A27DB-BD31-4B8C-83A1-F6EECF244321}">
-                <p14:modId xmlns:p14="http://schemas.microsoft.com/office/powerpoint/2010/main" val="3141011577"/>
+                <p14:modId xmlns:p14="http://schemas.microsoft.com/office/powerpoint/2010/main" val="4127826150"/>
               </p:ext>
             </p:extLst>
           </p:nvPr>
         </p:nvGraphicFramePr>
         <p:xfrm>
-          <a:off x="349956" y="282222"/>
-          <a:ext cx="10713155" cy="5700888"/>
+          <a:off x="379773" y="1013788"/>
+          <a:ext cx="10713155" cy="5101102"/>
         </p:xfrm>
         <a:graphic>
           <a:graphicData uri="http://schemas.openxmlformats.org/drawingml/2006/table">
             <a:tbl>
-              <a:tblPr/>
+              <a:tblPr firstRow="1"/>
               <a:tblGrid>
                 <a:gridCol w="2142631">
                   <a:extLst>
@@ -7649,7 +7595,7 @@
                   </a:extLst>
                 </a:gridCol>
               </a:tblGrid>
-              <a:tr h="1120185">
+              <a:tr h="427384">
                 <a:tc>
                   <a:txBody>
                     <a:bodyPr/>
@@ -7966,7 +7912,7 @@
                   </a:ext>
                 </a:extLst>
               </a:tr>
-              <a:tr h="821276">
+              <a:tr h="738795">
                 <a:tc>
                   <a:txBody>
                     <a:bodyPr/>
@@ -8288,7 +8234,7 @@
                   </a:ext>
                 </a:extLst>
               </a:tr>
-              <a:tr h="821276">
+              <a:tr h="738795">
                 <a:tc>
                   <a:txBody>
                     <a:bodyPr/>
@@ -8610,7 +8556,7 @@
                   </a:ext>
                 </a:extLst>
               </a:tr>
-              <a:tr h="1532758">
+              <a:tr h="1378823">
                 <a:tc>
                   <a:txBody>
                     <a:bodyPr/>
@@ -8951,7 +8897,7 @@
                   </a:ext>
                 </a:extLst>
               </a:tr>
-              <a:tr h="584117">
+              <a:tr h="525454">
                 <a:tc>
                   <a:txBody>
                     <a:bodyPr/>
@@ -9273,7 +9219,7 @@
                   </a:ext>
                 </a:extLst>
               </a:tr>
-              <a:tr h="821276">
+              <a:tr h="738795">
                 <a:tc>
                   <a:txBody>
                     <a:bodyPr/>
@@ -9599,6 +9545,46 @@
           </a:graphicData>
         </a:graphic>
       </p:graphicFrame>
+      <p:sp>
+        <p:nvSpPr>
+          <p:cNvPr id="2" name="Title 1">
+            <a:extLst>
+              <a:ext uri="{FF2B5EF4-FFF2-40B4-BE49-F238E27FC236}">
+                <a16:creationId xmlns:a16="http://schemas.microsoft.com/office/drawing/2014/main" id="{BC58F25D-B0B0-4600-AEA8-C2D39D027B13}"/>
+              </a:ext>
+            </a:extLst>
+          </p:cNvPr>
+          <p:cNvSpPr>
+            <a:spLocks noGrp="1"/>
+          </p:cNvSpPr>
+          <p:nvPr>
+            <p:ph type="title" idx="4294967295"/>
+          </p:nvPr>
+        </p:nvSpPr>
+        <p:spPr>
+          <a:xfrm>
+            <a:off x="349956" y="302347"/>
+            <a:ext cx="5104737" cy="862470"/>
+          </a:xfrm>
+        </p:spPr>
+        <p:txBody>
+          <a:bodyPr anchor="t">
+            <a:normAutofit/>
+          </a:bodyPr>
+          <a:lstStyle/>
+          <a:p>
+            <a:r>
+              <a:rPr lang="en-US" sz="4000" dirty="0"/>
+              <a:t>Course</a:t>
+            </a:r>
+            <a:r>
+              <a:rPr lang="en-US" sz="4000" baseline="0" dirty="0"/>
+              <a:t> grading rubric</a:t>
+            </a:r>
+            <a:endParaRPr lang="en-US" sz="4000" dirty="0"/>
+          </a:p>
+        </p:txBody>
+      </p:sp>
     </p:spTree>
     <p:extLst>
       <p:ext uri="{BB962C8B-B14F-4D97-AF65-F5344CB8AC3E}">
@@ -9845,57 +9831,6 @@
       </p:sp>
       <p:sp>
         <p:nvSpPr>
-          <p:cNvPr id="8" name="Shape 208">
-            <a:extLst>
-              <a:ext uri="{FF2B5EF4-FFF2-40B4-BE49-F238E27FC236}">
-                <a16:creationId xmlns:a16="http://schemas.microsoft.com/office/drawing/2014/main" id="{B5ED5A12-E140-4B27-8ED2-A376D55B0764}"/>
-              </a:ext>
-            </a:extLst>
-          </p:cNvPr>
-          <p:cNvSpPr txBox="1"/>
-          <p:nvPr/>
-        </p:nvSpPr>
-        <p:spPr>
-          <a:xfrm>
-            <a:off x="1092554" y="537618"/>
-            <a:ext cx="9519003" cy="769441"/>
-          </a:xfrm>
-          <a:prstGeom prst="rect">
-            <a:avLst/>
-          </a:prstGeom>
-          <a:noFill/>
-          <a:ln>
-            <a:noFill/>
-          </a:ln>
-        </p:spPr>
-        <p:txBody>
-          <a:bodyPr lIns="91425" tIns="45700" rIns="91425" bIns="45700" anchor="t" anchorCtr="0">
-            <a:noAutofit/>
-          </a:bodyPr>
-          <a:lstStyle/>
-          <a:p>
-            <a:pPr>
-              <a:buSzPct val="25000"/>
-            </a:pPr>
-            <a:r>
-              <a:rPr lang="en-US" sz="4400" dirty="0">
-                <a:solidFill>
-                  <a:schemeClr val="tx1">
-                    <a:lumMod val="75000"/>
-                  </a:schemeClr>
-                </a:solidFill>
-                <a:latin typeface="+mj-lt"/>
-                <a:ea typeface="Calibri"/>
-                <a:cs typeface="Calibri"/>
-                <a:sym typeface="Calibri"/>
-              </a:rPr>
-              <a:t>What does an “A” look like for you?</a:t>
-            </a:r>
-          </a:p>
-        </p:txBody>
-      </p:sp>
-      <p:sp>
-        <p:nvSpPr>
           <p:cNvPr id="6" name="Rectangle 5">
             <a:extLst>
               <a:ext uri="{FF2B5EF4-FFF2-40B4-BE49-F238E27FC236}">
@@ -10010,6 +9945,54 @@
               </a:rPr>
               <a:t> “I could explain…” </a:t>
             </a:r>
+          </a:p>
+        </p:txBody>
+      </p:sp>
+      <p:sp>
+        <p:nvSpPr>
+          <p:cNvPr id="3" name="Title 2">
+            <a:extLst>
+              <a:ext uri="{FF2B5EF4-FFF2-40B4-BE49-F238E27FC236}">
+                <a16:creationId xmlns:a16="http://schemas.microsoft.com/office/drawing/2014/main" id="{16032B81-21C1-4ADD-BE7B-635C2141D53F}"/>
+              </a:ext>
+            </a:extLst>
+          </p:cNvPr>
+          <p:cNvSpPr>
+            <a:spLocks noGrp="1"/>
+          </p:cNvSpPr>
+          <p:nvPr>
+            <p:ph type="title"/>
+          </p:nvPr>
+        </p:nvSpPr>
+        <p:spPr>
+          <a:xfrm>
+            <a:off x="1097280" y="654351"/>
+            <a:ext cx="10058400" cy="1450757"/>
+          </a:xfrm>
+        </p:spPr>
+        <p:txBody>
+          <a:bodyPr/>
+          <a:lstStyle/>
+          <a:p>
+            <a:pPr rtl="0" eaLnBrk="1" latinLnBrk="0" hangingPunct="1"/>
+            <a:r>
+              <a:rPr lang="en-US" sz="4400" kern="1200" dirty="0">
+                <a:solidFill>
+                  <a:srgbClr val="2F2F2F"/>
+                </a:solidFill>
+                <a:effectLst/>
+                <a:latin typeface="Sitka Display Semibold" pitchFamily="2" charset="0"/>
+                <a:ea typeface="Calibri" panose="020F0502020204030204" pitchFamily="34" charset="0"/>
+                <a:cs typeface="Calibri" panose="020F0502020204030204" pitchFamily="34" charset="0"/>
+              </a:rPr>
+              <a:t>What does an “A” look like for you?</a:t>
+            </a:r>
+            <a:endParaRPr lang="en-US" dirty="0">
+              <a:effectLst/>
+            </a:endParaRPr>
+          </a:p>
+          <a:p>
+            <a:endParaRPr lang="en-US" dirty="0"/>
           </a:p>
         </p:txBody>
       </p:sp>
@@ -11020,7 +11003,7 @@
       </p:grpSpPr>
       <p:pic>
         <p:nvPicPr>
-          <p:cNvPr id="3" name="Picture 2">
+          <p:cNvPr id="3" name="Picture 2" descr="Screenshot of the course website: https://communitymaplab.github.io/geog4300_datascience/&#10;">
             <a:extLst>
               <a:ext uri="{FF2B5EF4-FFF2-40B4-BE49-F238E27FC236}">
                 <a16:creationId xmlns:a16="http://schemas.microsoft.com/office/drawing/2014/main" id="{B6F6E829-3AD8-4DD1-AEE9-16CC0CC0BDA1}"/>
@@ -11040,7 +11023,7 @@
         </p:blipFill>
         <p:spPr>
           <a:xfrm>
-            <a:off x="0" y="0"/>
+            <a:off x="191877" y="-185975"/>
             <a:ext cx="12192000" cy="6453654"/>
           </a:xfrm>
           <a:prstGeom prst="rect">
@@ -11050,7 +11033,7 @@
       </p:pic>
       <p:sp>
         <p:nvSpPr>
-          <p:cNvPr id="5" name="TextBox 4">
+          <p:cNvPr id="5" name="TextBox 4" descr="Screenshot of the course website: https://communitymaplab.github.io/geog4300_datascience/&#10;">
             <a:extLst>
               <a:ext uri="{FF2B5EF4-FFF2-40B4-BE49-F238E27FC236}">
                 <a16:creationId xmlns:a16="http://schemas.microsoft.com/office/drawing/2014/main" id="{DF799070-83F7-4185-AF34-5E7BC0C08317}"/>
@@ -11089,7 +11072,7 @@
       </p:sp>
       <p:pic>
         <p:nvPicPr>
-          <p:cNvPr id="3074" name="Picture 2">
+          <p:cNvPr id="3074" name="Picture 2" descr="QR code for the course website">
             <a:extLst>
               <a:ext uri="{FF2B5EF4-FFF2-40B4-BE49-F238E27FC236}">
                 <a16:creationId xmlns:a16="http://schemas.microsoft.com/office/drawing/2014/main" id="{46E5C176-61B2-4F6E-B547-D96122650543}"/>
@@ -11134,6 +11117,45 @@
           </a:extLst>
         </p:spPr>
       </p:pic>
+      <p:sp>
+        <p:nvSpPr>
+          <p:cNvPr id="2" name="Title 1">
+            <a:extLst>
+              <a:ext uri="{FF2B5EF4-FFF2-40B4-BE49-F238E27FC236}">
+                <a16:creationId xmlns:a16="http://schemas.microsoft.com/office/drawing/2014/main" id="{43FF89C2-7B58-47F6-8047-EEF9DE434E3B}"/>
+              </a:ext>
+            </a:extLst>
+          </p:cNvPr>
+          <p:cNvSpPr>
+            <a:spLocks noGrp="1"/>
+          </p:cNvSpPr>
+          <p:nvPr>
+            <p:ph type="title" idx="4294967295"/>
+          </p:nvPr>
+        </p:nvSpPr>
+        <p:spPr>
+          <a:xfrm>
+            <a:off x="113306" y="3806687"/>
+            <a:ext cx="1208598" cy="306125"/>
+          </a:xfrm>
+        </p:spPr>
+        <p:txBody>
+          <a:bodyPr>
+            <a:normAutofit/>
+          </a:bodyPr>
+          <a:lstStyle/>
+          <a:p>
+            <a:r>
+              <a:rPr lang="en-US" sz="800" dirty="0">
+                <a:solidFill>
+                  <a:schemeClr val="bg1"/>
+                </a:solidFill>
+              </a:rPr>
+              <a:t>Course website</a:t>
+            </a:r>
+          </a:p>
+        </p:txBody>
+      </p:sp>
     </p:spTree>
     <p:extLst>
       <p:ext uri="{BB962C8B-B14F-4D97-AF65-F5344CB8AC3E}">
@@ -11765,60 +11787,9 @@
           </a:p>
         </p:txBody>
       </p:sp>
-      <p:sp>
-        <p:nvSpPr>
-          <p:cNvPr id="8" name="Shape 208">
-            <a:extLst>
-              <a:ext uri="{FF2B5EF4-FFF2-40B4-BE49-F238E27FC236}">
-                <a16:creationId xmlns:a16="http://schemas.microsoft.com/office/drawing/2014/main" id="{B5ED5A12-E140-4B27-8ED2-A376D55B0764}"/>
-              </a:ext>
-            </a:extLst>
-          </p:cNvPr>
-          <p:cNvSpPr txBox="1"/>
-          <p:nvPr/>
-        </p:nvSpPr>
-        <p:spPr>
-          <a:xfrm>
-            <a:off x="1253067" y="617537"/>
-            <a:ext cx="9516532" cy="769441"/>
-          </a:xfrm>
-          <a:prstGeom prst="rect">
-            <a:avLst/>
-          </a:prstGeom>
-          <a:noFill/>
-          <a:ln>
-            <a:noFill/>
-          </a:ln>
-        </p:spPr>
-        <p:txBody>
-          <a:bodyPr lIns="91425" tIns="45700" rIns="91425" bIns="45700" anchor="t" anchorCtr="0">
-            <a:noAutofit/>
-          </a:bodyPr>
-          <a:lstStyle/>
-          <a:p>
-            <a:pPr>
-              <a:buSzPct val="25000"/>
-            </a:pPr>
-            <a:r>
-              <a:rPr lang="en-US" sz="4400" dirty="0">
-                <a:solidFill>
-                  <a:schemeClr val="tx1">
-                    <a:lumMod val="75000"/>
-                  </a:schemeClr>
-                </a:solidFill>
-                <a:latin typeface="+mj-lt"/>
-                <a:ea typeface="Calibri"/>
-                <a:cs typeface="Calibri"/>
-                <a:sym typeface="Calibri"/>
-              </a:rPr>
-              <a:t>What is standards-based grading?</a:t>
-            </a:r>
-          </a:p>
-        </p:txBody>
-      </p:sp>
       <p:pic>
         <p:nvPicPr>
-          <p:cNvPr id="4" name="Picture 3">
+          <p:cNvPr id="4" name="Picture 3" descr="Tweet from Jesse Stommel explaining drawbacks of assessment through grades">
             <a:extLst>
               <a:ext uri="{FF2B5EF4-FFF2-40B4-BE49-F238E27FC236}">
                 <a16:creationId xmlns:a16="http://schemas.microsoft.com/office/drawing/2014/main" id="{F54C7E4A-9AA9-269B-12AC-7B8789AA0B97}"/>
@@ -11853,6 +11824,49 @@
           </a:ln>
         </p:spPr>
       </p:pic>
+      <p:sp>
+        <p:nvSpPr>
+          <p:cNvPr id="3" name="Title 2">
+            <a:extLst>
+              <a:ext uri="{FF2B5EF4-FFF2-40B4-BE49-F238E27FC236}">
+                <a16:creationId xmlns:a16="http://schemas.microsoft.com/office/drawing/2014/main" id="{B71C7718-57D1-43C9-ACD7-329205521EBE}"/>
+              </a:ext>
+            </a:extLst>
+          </p:cNvPr>
+          <p:cNvSpPr>
+            <a:spLocks noGrp="1"/>
+          </p:cNvSpPr>
+          <p:nvPr>
+            <p:ph type="title"/>
+          </p:nvPr>
+        </p:nvSpPr>
+        <p:spPr/>
+        <p:txBody>
+          <a:bodyPr/>
+          <a:lstStyle/>
+          <a:p>
+            <a:pPr rtl="0" eaLnBrk="1" latinLnBrk="0" hangingPunct="1"/>
+            <a:r>
+              <a:rPr lang="en-US" sz="4400" kern="1200" dirty="0">
+                <a:solidFill>
+                  <a:srgbClr val="2F2F2F"/>
+                </a:solidFill>
+                <a:effectLst/>
+                <a:latin typeface="Sitka Display Semibold" pitchFamily="2" charset="0"/>
+                <a:ea typeface="Calibri" panose="020F0502020204030204" pitchFamily="34" charset="0"/>
+                <a:cs typeface="Calibri" panose="020F0502020204030204" pitchFamily="34" charset="0"/>
+              </a:rPr>
+              <a:t>What is standards-based grading?</a:t>
+            </a:r>
+            <a:endParaRPr lang="en-US" dirty="0">
+              <a:effectLst/>
+            </a:endParaRPr>
+          </a:p>
+          <a:p>
+            <a:endParaRPr lang="en-US" dirty="0"/>
+          </a:p>
+        </p:txBody>
+      </p:sp>
     </p:spTree>
     <p:extLst>
       <p:ext uri="{BB962C8B-B14F-4D97-AF65-F5344CB8AC3E}">
